--- a/Store Support/Projects/VET_Dashboard/reports/VET_Executive_Report_WK09.pptx
+++ b/Store Support/Projects/VET_Dashboard/reports/VET_Executive_Report_WK09.pptx
@@ -3110,7 +3110,7 @@
         <p:spPr>
           <a:xfrm>
             <a:off x="182880" y="182880"/>
-            <a:ext cx="8412480" cy="4414379"/>
+            <a:ext cx="8412480" cy="3865441"/>
           </a:xfrm>
           <a:prstGeom prst="rect">
             <a:avLst/>
@@ -3152,7 +3152,7 @@
         <p:spPr>
           <a:xfrm>
             <a:off x="182880" y="182880"/>
-            <a:ext cx="8412480" cy="2067398"/>
+            <a:ext cx="8412480" cy="4041027"/>
           </a:xfrm>
           <a:prstGeom prst="rect">
             <a:avLst/>
@@ -3194,7 +3194,7 @@
         <p:spPr>
           <a:xfrm>
             <a:off x="182880" y="182880"/>
-            <a:ext cx="8412480" cy="5751207"/>
+            <a:ext cx="8412480" cy="4420571"/>
           </a:xfrm>
           <a:prstGeom prst="rect">
             <a:avLst/>
@@ -3236,7 +3236,7 @@
         <p:spPr>
           <a:xfrm>
             <a:off x="182880" y="182880"/>
-            <a:ext cx="8412480" cy="3531991"/>
+            <a:ext cx="8412480" cy="4800115"/>
           </a:xfrm>
           <a:prstGeom prst="rect">
             <a:avLst/>
@@ -3278,7 +3278,7 @@
         <p:spPr>
           <a:xfrm>
             <a:off x="182880" y="182880"/>
-            <a:ext cx="8412480" cy="2156703"/>
+            <a:ext cx="8412480" cy="4041027"/>
           </a:xfrm>
           <a:prstGeom prst="rect">
             <a:avLst/>
@@ -3320,7 +3320,7 @@
         <p:spPr>
           <a:xfrm>
             <a:off x="182880" y="182880"/>
-            <a:ext cx="8412480" cy="1219006"/>
+            <a:ext cx="8412480" cy="4420571"/>
           </a:xfrm>
           <a:prstGeom prst="rect">
             <a:avLst/>

--- a/Store Support/Projects/VET_Dashboard/reports/VET_Executive_Report_WK09.pptx
+++ b/Store Support/Projects/VET_Dashboard/reports/VET_Executive_Report_WK09.pptx
@@ -11,6 +11,10 @@
     <p:sldId id="259" r:id="rId10"/>
     <p:sldId id="260" r:id="rId11"/>
     <p:sldId id="261" r:id="rId12"/>
+    <p:sldId id="262" r:id="rId13"/>
+    <p:sldId id="263" r:id="rId14"/>
+    <p:sldId id="264" r:id="rId15"/>
+    <p:sldId id="265" r:id="rId16"/>
   </p:sldIdLst>
   <p:sldSz cx="8778240" cy="6583680" type="screen4x3"/>
   <p:notesSz cx="6858000" cy="9144000"/>
@@ -3086,6 +3090,143 @@
 <file path=ppt/slides/slide1.xml><?xml version="1.0" encoding="utf-8"?>
 <p:sld xmlns:a="http://schemas.openxmlformats.org/drawingml/2006/main" xmlns:p="http://schemas.openxmlformats.org/presentationml/2006/main" xmlns:r="http://schemas.openxmlformats.org/officeDocument/2006/relationships">
   <p:cSld>
+    <p:bg>
+      <p:bgPr>
+        <a:solidFill>
+          <a:srgbClr val="1E3A8A"/>
+        </a:solidFill>
+        <a:effectLst/>
+      </p:bgPr>
+    </p:bg>
+    <p:spTree>
+      <p:nvGrpSpPr>
+        <p:cNvPr id="1" name=""/>
+        <p:cNvGrpSpPr/>
+        <p:nvPr/>
+      </p:nvGrpSpPr>
+      <p:grpSpPr/>
+      <p:sp>
+        <p:nvSpPr>
+          <p:cNvPr id="2" name="TextBox 1"/>
+          <p:cNvSpPr txBox="1"/>
+          <p:nvPr/>
+        </p:nvSpPr>
+        <p:spPr>
+          <a:xfrm>
+            <a:off x="457200" y="2286000"/>
+            <a:ext cx="7863840" cy="1645920"/>
+          </a:xfrm>
+          <a:prstGeom prst="rect">
+            <a:avLst/>
+          </a:prstGeom>
+          <a:noFill/>
+        </p:spPr>
+        <p:txBody>
+          <a:bodyPr wrap="none">
+            <a:spAutoFit/>
+          </a:bodyPr>
+          <a:lstStyle/>
+          <a:p>
+            <a:pPr algn="ctr"/>
+            <a:r>
+              <a:rPr sz="4400" b="1">
+                <a:solidFill>
+                  <a:srgbClr val="FFFFFF"/>
+                </a:solidFill>
+              </a:rPr>
+              <a:t>V.E.T. Executive Report</a:t>
+            </a:r>
+          </a:p>
+        </p:txBody>
+      </p:sp>
+      <p:sp>
+        <p:nvSpPr>
+          <p:cNvPr id="3" name="TextBox 2"/>
+          <p:cNvSpPr txBox="1"/>
+          <p:nvPr/>
+        </p:nvSpPr>
+        <p:spPr>
+          <a:xfrm>
+            <a:off x="457200" y="3840480"/>
+            <a:ext cx="7863840" cy="731520"/>
+          </a:xfrm>
+          <a:prstGeom prst="rect">
+            <a:avLst/>
+          </a:prstGeom>
+          <a:noFill/>
+        </p:spPr>
+        <p:txBody>
+          <a:bodyPr wrap="none">
+            <a:spAutoFit/>
+          </a:bodyPr>
+          <a:lstStyle/>
+          <a:p>
+            <a:pPr algn="ctr"/>
+            <a:r>
+              <a:rPr sz="2000">
+                <a:solidFill>
+                  <a:srgbClr val="FFFFFF"/>
+                </a:solidFill>
+              </a:rPr>
+              <a:t>Walmart Enterprise Transformation</a:t>
+            </a:r>
+          </a:p>
+        </p:txBody>
+      </p:sp>
+      <p:sp>
+        <p:nvSpPr>
+          <p:cNvPr id="4" name="Rectangle 3"/>
+          <p:cNvSpPr/>
+          <p:nvPr/>
+        </p:nvSpPr>
+        <p:spPr>
+          <a:xfrm>
+            <a:off x="0" y="6126480"/>
+            <a:ext cx="8778240" cy="457200"/>
+          </a:xfrm>
+          <a:prstGeom prst="rect">
+            <a:avLst/>
+          </a:prstGeom>
+          <a:solidFill>
+            <a:srgbClr val="FFC220"/>
+          </a:solidFill>
+          <a:ln>
+            <a:noFill/>
+          </a:ln>
+        </p:spPr>
+        <p:style>
+          <a:lnRef idx="1">
+            <a:schemeClr val="accent1"/>
+          </a:lnRef>
+          <a:fillRef idx="3">
+            <a:schemeClr val="accent1"/>
+          </a:fillRef>
+          <a:effectRef idx="2">
+            <a:schemeClr val="accent1"/>
+          </a:effectRef>
+          <a:fontRef idx="minor">
+            <a:schemeClr val="lt1"/>
+          </a:fontRef>
+        </p:style>
+        <p:txBody>
+          <a:bodyPr rtlCol="0" anchor="ctr"/>
+          <a:lstStyle/>
+          <a:p>
+            <a:pPr algn="ctr"/>
+          </a:p>
+        </p:txBody>
+      </p:sp>
+    </p:spTree>
+  </p:cSld>
+  <p:clrMapOvr>
+    <a:masterClrMapping/>
+  </p:clrMapOvr>
+</p:sld>
+</file>
+
+<file path=ppt/slides/slide10.xml><?xml version="1.0" encoding="utf-8"?>
+<p:sld xmlns:a="http://schemas.openxmlformats.org/drawingml/2006/main" xmlns:p="http://schemas.openxmlformats.org/presentationml/2006/main" xmlns:r="http://schemas.openxmlformats.org/officeDocument/2006/relationships">
+  <p:cSld>
     <p:spTree>
       <p:nvGrpSpPr>
         <p:cNvPr id="1" name=""/>
@@ -3109,8 +3250,8 @@
         </p:blipFill>
         <p:spPr>
           <a:xfrm>
-            <a:off x="182880" y="182880"/>
-            <a:ext cx="8412480" cy="3865441"/>
+            <a:off x="0" y="0"/>
+            <a:ext cx="8778240" cy="2800277"/>
           </a:xfrm>
           <a:prstGeom prst="rect">
             <a:avLst/>
@@ -3151,8 +3292,8 @@
         </p:blipFill>
         <p:spPr>
           <a:xfrm>
-            <a:off x="182880" y="182880"/>
-            <a:ext cx="8412480" cy="4041027"/>
+            <a:off x="0" y="0"/>
+            <a:ext cx="8778240" cy="6583680"/>
           </a:xfrm>
           <a:prstGeom prst="rect">
             <a:avLst/>
@@ -3193,8 +3334,8 @@
         </p:blipFill>
         <p:spPr>
           <a:xfrm>
-            <a:off x="182880" y="182880"/>
-            <a:ext cx="8412480" cy="4420571"/>
+            <a:off x="0" y="0"/>
+            <a:ext cx="8778240" cy="4491625"/>
           </a:xfrm>
           <a:prstGeom prst="rect">
             <a:avLst/>
@@ -3235,8 +3376,8 @@
         </p:blipFill>
         <p:spPr>
           <a:xfrm>
-            <a:off x="182880" y="182880"/>
-            <a:ext cx="8412480" cy="4800115"/>
+            <a:off x="0" y="0"/>
+            <a:ext cx="8778240" cy="1141543"/>
           </a:xfrm>
           <a:prstGeom prst="rect">
             <a:avLst/>
@@ -3277,8 +3418,8 @@
         </p:blipFill>
         <p:spPr>
           <a:xfrm>
-            <a:off x="182880" y="182880"/>
-            <a:ext cx="8412480" cy="4041027"/>
+            <a:off x="0" y="0"/>
+            <a:ext cx="8778240" cy="6583680"/>
           </a:xfrm>
           <a:prstGeom prst="rect">
             <a:avLst/>
@@ -3319,8 +3460,134 @@
         </p:blipFill>
         <p:spPr>
           <a:xfrm>
-            <a:off x="182880" y="182880"/>
-            <a:ext cx="8412480" cy="4420571"/>
+            <a:off x="0" y="0"/>
+            <a:ext cx="8778240" cy="6299458"/>
+          </a:xfrm>
+          <a:prstGeom prst="rect">
+            <a:avLst/>
+          </a:prstGeom>
+        </p:spPr>
+      </p:pic>
+    </p:spTree>
+  </p:cSld>
+  <p:clrMapOvr>
+    <a:masterClrMapping/>
+  </p:clrMapOvr>
+</p:sld>
+</file>
+
+<file path=ppt/slides/slide7.xml><?xml version="1.0" encoding="utf-8"?>
+<p:sld xmlns:a="http://schemas.openxmlformats.org/drawingml/2006/main" xmlns:p="http://schemas.openxmlformats.org/presentationml/2006/main" xmlns:r="http://schemas.openxmlformats.org/officeDocument/2006/relationships">
+  <p:cSld>
+    <p:spTree>
+      <p:nvGrpSpPr>
+        <p:cNvPr id="1" name=""/>
+        <p:cNvGrpSpPr/>
+        <p:nvPr/>
+      </p:nvGrpSpPr>
+      <p:grpSpPr/>
+      <p:pic>
+        <p:nvPicPr>
+          <p:cNvPr id="2" name="Picture 1" descr="image.jpg"/>
+          <p:cNvPicPr>
+            <a:picLocks noChangeAspect="1"/>
+          </p:cNvPicPr>
+          <p:nvPr/>
+        </p:nvPicPr>
+        <p:blipFill>
+          <a:blip r:embed="rId2"/>
+          <a:stretch>
+            <a:fillRect/>
+          </a:stretch>
+        </p:blipFill>
+        <p:spPr>
+          <a:xfrm>
+            <a:off x="0" y="0"/>
+            <a:ext cx="8778240" cy="6583680"/>
+          </a:xfrm>
+          <a:prstGeom prst="rect">
+            <a:avLst/>
+          </a:prstGeom>
+        </p:spPr>
+      </p:pic>
+    </p:spTree>
+  </p:cSld>
+  <p:clrMapOvr>
+    <a:masterClrMapping/>
+  </p:clrMapOvr>
+</p:sld>
+</file>
+
+<file path=ppt/slides/slide8.xml><?xml version="1.0" encoding="utf-8"?>
+<p:sld xmlns:a="http://schemas.openxmlformats.org/drawingml/2006/main" xmlns:p="http://schemas.openxmlformats.org/presentationml/2006/main" xmlns:r="http://schemas.openxmlformats.org/officeDocument/2006/relationships">
+  <p:cSld>
+    <p:spTree>
+      <p:nvGrpSpPr>
+        <p:cNvPr id="1" name=""/>
+        <p:cNvGrpSpPr/>
+        <p:nvPr/>
+      </p:nvGrpSpPr>
+      <p:grpSpPr/>
+      <p:pic>
+        <p:nvPicPr>
+          <p:cNvPr id="2" name="Picture 1" descr="image.jpg"/>
+          <p:cNvPicPr>
+            <a:picLocks noChangeAspect="1"/>
+          </p:cNvPicPr>
+          <p:nvPr/>
+        </p:nvPicPr>
+        <p:blipFill>
+          <a:blip r:embed="rId2"/>
+          <a:stretch>
+            <a:fillRect/>
+          </a:stretch>
+        </p:blipFill>
+        <p:spPr>
+          <a:xfrm>
+            <a:off x="0" y="0"/>
+            <a:ext cx="8778240" cy="6583680"/>
+          </a:xfrm>
+          <a:prstGeom prst="rect">
+            <a:avLst/>
+          </a:prstGeom>
+        </p:spPr>
+      </p:pic>
+    </p:spTree>
+  </p:cSld>
+  <p:clrMapOvr>
+    <a:masterClrMapping/>
+  </p:clrMapOvr>
+</p:sld>
+</file>
+
+<file path=ppt/slides/slide9.xml><?xml version="1.0" encoding="utf-8"?>
+<p:sld xmlns:a="http://schemas.openxmlformats.org/drawingml/2006/main" xmlns:p="http://schemas.openxmlformats.org/presentationml/2006/main" xmlns:r="http://schemas.openxmlformats.org/officeDocument/2006/relationships">
+  <p:cSld>
+    <p:spTree>
+      <p:nvGrpSpPr>
+        <p:cNvPr id="1" name=""/>
+        <p:cNvGrpSpPr/>
+        <p:nvPr/>
+      </p:nvGrpSpPr>
+      <p:grpSpPr/>
+      <p:pic>
+        <p:nvPicPr>
+          <p:cNvPr id="2" name="Picture 1" descr="image.jpg"/>
+          <p:cNvPicPr>
+            <a:picLocks noChangeAspect="1"/>
+          </p:cNvPicPr>
+          <p:nvPr/>
+        </p:nvPicPr>
+        <p:blipFill>
+          <a:blip r:embed="rId2"/>
+          <a:stretch>
+            <a:fillRect/>
+          </a:stretch>
+        </p:blipFill>
+        <p:spPr>
+          <a:xfrm>
+            <a:off x="0" y="0"/>
+            <a:ext cx="8778240" cy="4146833"/>
           </a:xfrm>
           <a:prstGeom prst="rect">
             <a:avLst/>

--- a/Store Support/Projects/VET_Dashboard/reports/VET_Executive_Report_WK09.pptx
+++ b/Store Support/Projects/VET_Dashboard/reports/VET_Executive_Report_WK09.pptx
@@ -15,6 +15,8 @@
     <p:sldId id="263" r:id="rId14"/>
     <p:sldId id="264" r:id="rId15"/>
     <p:sldId id="265" r:id="rId16"/>
+    <p:sldId id="266" r:id="rId17"/>
+    <p:sldId id="267" r:id="rId18"/>
   </p:sldIdLst>
   <p:sldSz cx="8778240" cy="6583680" type="screen4x3"/>
   <p:notesSz cx="6858000" cy="9144000"/>
@@ -3251,7 +3253,91 @@
         <p:spPr>
           <a:xfrm>
             <a:off x="0" y="0"/>
-            <a:ext cx="8778240" cy="2800277"/>
+            <a:ext cx="8778240" cy="1048356"/>
+          </a:xfrm>
+          <a:prstGeom prst="rect">
+            <a:avLst/>
+          </a:prstGeom>
+        </p:spPr>
+      </p:pic>
+    </p:spTree>
+  </p:cSld>
+  <p:clrMapOvr>
+    <a:masterClrMapping/>
+  </p:clrMapOvr>
+</p:sld>
+</file>
+
+<file path=ppt/slides/slide11.xml><?xml version="1.0" encoding="utf-8"?>
+<p:sld xmlns:a="http://schemas.openxmlformats.org/drawingml/2006/main" xmlns:p="http://schemas.openxmlformats.org/presentationml/2006/main" xmlns:r="http://schemas.openxmlformats.org/officeDocument/2006/relationships">
+  <p:cSld>
+    <p:spTree>
+      <p:nvGrpSpPr>
+        <p:cNvPr id="1" name=""/>
+        <p:cNvGrpSpPr/>
+        <p:nvPr/>
+      </p:nvGrpSpPr>
+      <p:grpSpPr/>
+      <p:pic>
+        <p:nvPicPr>
+          <p:cNvPr id="2" name="Picture 1" descr="image.jpg"/>
+          <p:cNvPicPr>
+            <a:picLocks noChangeAspect="1"/>
+          </p:cNvPicPr>
+          <p:nvPr/>
+        </p:nvPicPr>
+        <p:blipFill>
+          <a:blip r:embed="rId2"/>
+          <a:stretch>
+            <a:fillRect/>
+          </a:stretch>
+        </p:blipFill>
+        <p:spPr>
+          <a:xfrm>
+            <a:off x="0" y="0"/>
+            <a:ext cx="8778240" cy="3820677"/>
+          </a:xfrm>
+          <a:prstGeom prst="rect">
+            <a:avLst/>
+          </a:prstGeom>
+        </p:spPr>
+      </p:pic>
+    </p:spTree>
+  </p:cSld>
+  <p:clrMapOvr>
+    <a:masterClrMapping/>
+  </p:clrMapOvr>
+</p:sld>
+</file>
+
+<file path=ppt/slides/slide12.xml><?xml version="1.0" encoding="utf-8"?>
+<p:sld xmlns:a="http://schemas.openxmlformats.org/drawingml/2006/main" xmlns:p="http://schemas.openxmlformats.org/presentationml/2006/main" xmlns:r="http://schemas.openxmlformats.org/officeDocument/2006/relationships">
+  <p:cSld>
+    <p:spTree>
+      <p:nvGrpSpPr>
+        <p:cNvPr id="1" name=""/>
+        <p:cNvGrpSpPr/>
+        <p:nvPr/>
+      </p:nvGrpSpPr>
+      <p:grpSpPr/>
+      <p:pic>
+        <p:nvPicPr>
+          <p:cNvPr id="2" name="Picture 1" descr="image.jpg"/>
+          <p:cNvPicPr>
+            <a:picLocks noChangeAspect="1"/>
+          </p:cNvPicPr>
+          <p:nvPr/>
+        </p:nvPicPr>
+        <p:blipFill>
+          <a:blip r:embed="rId2"/>
+          <a:stretch>
+            <a:fillRect/>
+          </a:stretch>
+        </p:blipFill>
+        <p:spPr>
+          <a:xfrm>
+            <a:off x="0" y="0"/>
+            <a:ext cx="8778240" cy="1444402"/>
           </a:xfrm>
           <a:prstGeom prst="rect">
             <a:avLst/>
@@ -3293,7 +3379,7 @@
         <p:spPr>
           <a:xfrm>
             <a:off x="0" y="0"/>
-            <a:ext cx="8778240" cy="6583680"/>
+            <a:ext cx="8778240" cy="3508500"/>
           </a:xfrm>
           <a:prstGeom prst="rect">
             <a:avLst/>
@@ -3335,7 +3421,7 @@
         <p:spPr>
           <a:xfrm>
             <a:off x="0" y="0"/>
-            <a:ext cx="8778240" cy="4491625"/>
+            <a:ext cx="8778240" cy="3820677"/>
           </a:xfrm>
           <a:prstGeom prst="rect">
             <a:avLst/>
@@ -3377,7 +3463,7 @@
         <p:spPr>
           <a:xfrm>
             <a:off x="0" y="0"/>
-            <a:ext cx="8778240" cy="1141543"/>
+            <a:ext cx="8778240" cy="1048356"/>
           </a:xfrm>
           <a:prstGeom prst="rect">
             <a:avLst/>
@@ -3419,7 +3505,7 @@
         <p:spPr>
           <a:xfrm>
             <a:off x="0" y="0"/>
-            <a:ext cx="8778240" cy="6583680"/>
+            <a:ext cx="8778240" cy="3820677"/>
           </a:xfrm>
           <a:prstGeom prst="rect">
             <a:avLst/>
@@ -3461,7 +3547,7 @@
         <p:spPr>
           <a:xfrm>
             <a:off x="0" y="0"/>
-            <a:ext cx="8778240" cy="6299458"/>
+            <a:ext cx="8778240" cy="1444402"/>
           </a:xfrm>
           <a:prstGeom prst="rect">
             <a:avLst/>
@@ -3503,7 +3589,7 @@
         <p:spPr>
           <a:xfrm>
             <a:off x="0" y="0"/>
-            <a:ext cx="8778240" cy="6583680"/>
+            <a:ext cx="8778240" cy="3820677"/>
           </a:xfrm>
           <a:prstGeom prst="rect">
             <a:avLst/>
@@ -3545,7 +3631,7 @@
         <p:spPr>
           <a:xfrm>
             <a:off x="0" y="0"/>
-            <a:ext cx="8778240" cy="6583680"/>
+            <a:ext cx="8778240" cy="1840448"/>
           </a:xfrm>
           <a:prstGeom prst="rect">
             <a:avLst/>
@@ -3587,7 +3673,7 @@
         <p:spPr>
           <a:xfrm>
             <a:off x="0" y="0"/>
-            <a:ext cx="8778240" cy="4146833"/>
+            <a:ext cx="8778240" cy="3820677"/>
           </a:xfrm>
           <a:prstGeom prst="rect">
             <a:avLst/>
